--- a/🌱 EcoSpendAI.pptx
+++ b/🌱 EcoSpendAI.pptx
@@ -11,8 +11,9 @@
     <p:sldId id="259" r:id="rId5"/>
     <p:sldId id="260" r:id="rId6"/>
     <p:sldId id="261" r:id="rId7"/>
-    <p:sldId id="262" r:id="rId8"/>
-    <p:sldId id="263" r:id="rId9"/>
+    <p:sldId id="264" r:id="rId8"/>
+    <p:sldId id="262" r:id="rId9"/>
+    <p:sldId id="263" r:id="rId10"/>
   </p:sldIdLst>
   <p:sldSz cx="12192000" cy="6858000"/>
   <p:notesSz cx="6858000" cy="9144000"/>
@@ -111,7 +112,73 @@
       </a:defRPr>
     </a:lvl9pPr>
   </p:defaultTextStyle>
+  <p:extLst>
+    <p:ext uri="{EFAFB233-063F-42B5-8137-9DF3F51BA10A}">
+      <p15:sldGuideLst xmlns:p15="http://schemas.microsoft.com/office/powerpoint/2012/main"/>
+    </p:ext>
+  </p:extLst>
 </p:presentation>
+</file>
+
+<file path=ppt/changesInfos/changesInfo1.xml><?xml version="1.0" encoding="utf-8"?>
+<pc:chgInfo xmlns:a="http://schemas.openxmlformats.org/drawingml/2006/main" xmlns:r="http://schemas.openxmlformats.org/officeDocument/2006/relationships" xmlns:ac="http://schemas.microsoft.com/office/drawing/2013/main/command" xmlns:pc="http://schemas.microsoft.com/office/powerpoint/2013/main/command">
+  <pc:docChgLst>
+    <pc:chgData name="Vaishnavasreyas M" userId="36e2b61aa0726f4e" providerId="LiveId" clId="{66AA0D73-ADAF-4094-BBA6-A7264EFF401A}"/>
+    <pc:docChg chg="custSel addSld modSld">
+      <pc:chgData name="Vaishnavasreyas M" userId="36e2b61aa0726f4e" providerId="LiveId" clId="{66AA0D73-ADAF-4094-BBA6-A7264EFF401A}" dt="2026-09-12T13:59:58.182" v="29" actId="14100"/>
+      <pc:docMkLst>
+        <pc:docMk/>
+      </pc:docMkLst>
+      <pc:sldChg chg="addSp delSp modSp new mod">
+        <pc:chgData name="Vaishnavasreyas M" userId="36e2b61aa0726f4e" providerId="LiveId" clId="{66AA0D73-ADAF-4094-BBA6-A7264EFF401A}" dt="2026-09-12T13:59:58.182" v="29" actId="14100"/>
+        <pc:sldMkLst>
+          <pc:docMk/>
+          <pc:sldMk cId="3743266014" sldId="264"/>
+        </pc:sldMkLst>
+        <pc:spChg chg="mod">
+          <ac:chgData name="Vaishnavasreyas M" userId="36e2b61aa0726f4e" providerId="LiveId" clId="{66AA0D73-ADAF-4094-BBA6-A7264EFF401A}" dt="2026-09-12T13:59:28.319" v="24" actId="20577"/>
+          <ac:spMkLst>
+            <pc:docMk/>
+            <pc:sldMk cId="3743266014" sldId="264"/>
+            <ac:spMk id="2" creationId="{A0EFCE50-FCA6-3CDB-7E9B-625BE2A99674}"/>
+          </ac:spMkLst>
+        </pc:spChg>
+        <pc:spChg chg="del">
+          <ac:chgData name="Vaishnavasreyas M" userId="36e2b61aa0726f4e" providerId="LiveId" clId="{66AA0D73-ADAF-4094-BBA6-A7264EFF401A}" dt="2026-09-12T13:56:56.257" v="18" actId="931"/>
+          <ac:spMkLst>
+            <pc:docMk/>
+            <pc:sldMk cId="3743266014" sldId="264"/>
+            <ac:spMk id="3" creationId="{C60B8965-7E75-6F02-56CD-6C658C0CE587}"/>
+          </ac:spMkLst>
+        </pc:spChg>
+        <pc:spChg chg="add del mod">
+          <ac:chgData name="Vaishnavasreyas M" userId="36e2b61aa0726f4e" providerId="LiveId" clId="{66AA0D73-ADAF-4094-BBA6-A7264EFF401A}" dt="2026-09-12T13:58:14.485" v="20" actId="931"/>
+          <ac:spMkLst>
+            <pc:docMk/>
+            <pc:sldMk cId="3743266014" sldId="264"/>
+            <ac:spMk id="7" creationId="{CE96D37E-8455-BCAA-FCD8-C5D66361E3F1}"/>
+          </ac:spMkLst>
+        </pc:spChg>
+        <pc:picChg chg="add del mod ord">
+          <ac:chgData name="Vaishnavasreyas M" userId="36e2b61aa0726f4e" providerId="LiveId" clId="{66AA0D73-ADAF-4094-BBA6-A7264EFF401A}" dt="2026-09-12T13:57:02.484" v="19" actId="478"/>
+          <ac:picMkLst>
+            <pc:docMk/>
+            <pc:sldMk cId="3743266014" sldId="264"/>
+            <ac:picMk id="5" creationId="{51B8D1C1-2DB2-7904-7DAA-0253C8BA17CD}"/>
+          </ac:picMkLst>
+        </pc:picChg>
+        <pc:picChg chg="add mod ord">
+          <ac:chgData name="Vaishnavasreyas M" userId="36e2b61aa0726f4e" providerId="LiveId" clId="{66AA0D73-ADAF-4094-BBA6-A7264EFF401A}" dt="2026-09-12T13:59:58.182" v="29" actId="14100"/>
+          <ac:picMkLst>
+            <pc:docMk/>
+            <pc:sldMk cId="3743266014" sldId="264"/>
+            <ac:picMk id="9" creationId="{FA7DF367-D1DF-16AD-1593-54CE5147FA59}"/>
+          </ac:picMkLst>
+        </pc:picChg>
+      </pc:sldChg>
+    </pc:docChg>
+  </pc:docChgLst>
+</pc:chgInfo>
 </file>
 
 <file path=ppt/slideLayouts/slideLayout1.xml><?xml version="1.0" encoding="utf-8"?>
@@ -4427,6 +4494,117 @@
           <p:cNvPr id="2" name="Title 1">
             <a:extLst>
               <a:ext uri="{FF2B5EF4-FFF2-40B4-BE49-F238E27FC236}">
+                <a16:creationId xmlns:a16="http://schemas.microsoft.com/office/drawing/2014/main" id="{A0EFCE50-FCA6-3CDB-7E9B-625BE2A99674}"/>
+              </a:ext>
+            </a:extLst>
+          </p:cNvPr>
+          <p:cNvSpPr>
+            <a:spLocks noGrp="1"/>
+          </p:cNvSpPr>
+          <p:nvPr>
+            <p:ph type="title"/>
+          </p:nvPr>
+        </p:nvSpPr>
+        <p:spPr/>
+        <p:txBody>
+          <a:bodyPr>
+            <a:normAutofit/>
+          </a:bodyPr>
+          <a:lstStyle/>
+          <a:p>
+            <a:r>
+              <a:rPr lang="en-US" sz="3600" dirty="0">
+                <a:solidFill>
+                  <a:schemeClr val="accent6">
+                    <a:lumMod val="75000"/>
+                  </a:schemeClr>
+                </a:solidFill>
+              </a:rPr>
+              <a:t>Results: Report</a:t>
+            </a:r>
+            <a:endParaRPr lang="en-IN" sz="3600" dirty="0">
+              <a:solidFill>
+                <a:schemeClr val="accent6">
+                  <a:lumMod val="75000"/>
+                </a:schemeClr>
+              </a:solidFill>
+            </a:endParaRPr>
+          </a:p>
+        </p:txBody>
+      </p:sp>
+      <p:pic>
+        <p:nvPicPr>
+          <p:cNvPr id="9" name="Content Placeholder 8">
+            <a:extLst>
+              <a:ext uri="{FF2B5EF4-FFF2-40B4-BE49-F238E27FC236}">
+                <a16:creationId xmlns:a16="http://schemas.microsoft.com/office/drawing/2014/main" id="{FA7DF367-D1DF-16AD-1593-54CE5147FA59}"/>
+              </a:ext>
+            </a:extLst>
+          </p:cNvPr>
+          <p:cNvPicPr>
+            <a:picLocks noGrp="1" noChangeAspect="1"/>
+          </p:cNvPicPr>
+          <p:nvPr>
+            <p:ph idx="1"/>
+          </p:nvPr>
+        </p:nvPicPr>
+        <p:blipFill>
+          <a:blip r:embed="rId2">
+            <a:extLst>
+              <a:ext uri="{28A0092B-C50C-407E-A947-70E740481C1C}">
+                <a14:useLocalDpi xmlns:a14="http://schemas.microsoft.com/office/drawing/2010/main" val="0"/>
+              </a:ext>
+            </a:extLst>
+          </a:blip>
+          <a:stretch>
+            <a:fillRect/>
+          </a:stretch>
+        </p:blipFill>
+        <p:spPr>
+          <a:xfrm>
+            <a:off x="749631" y="1390919"/>
+            <a:ext cx="8867967" cy="5325567"/>
+          </a:xfrm>
+          <a:prstGeom prst="rect">
+            <a:avLst/>
+          </a:prstGeom>
+        </p:spPr>
+      </p:pic>
+    </p:spTree>
+    <p:extLst>
+      <p:ext uri="{BB962C8B-B14F-4D97-AF65-F5344CB8AC3E}">
+        <p14:creationId xmlns:p14="http://schemas.microsoft.com/office/powerpoint/2010/main" val="3743266014"/>
+      </p:ext>
+    </p:extLst>
+  </p:cSld>
+  <p:clrMapOvr>
+    <a:masterClrMapping/>
+  </p:clrMapOvr>
+</p:sld>
+</file>
+
+<file path=ppt/slides/slide8.xml><?xml version="1.0" encoding="utf-8"?>
+<p:sld xmlns:a="http://schemas.openxmlformats.org/drawingml/2006/main" xmlns:r="http://schemas.openxmlformats.org/officeDocument/2006/relationships" xmlns:p="http://schemas.openxmlformats.org/presentationml/2006/main">
+  <p:cSld>
+    <p:spTree>
+      <p:nvGrpSpPr>
+        <p:cNvPr id="1" name=""/>
+        <p:cNvGrpSpPr/>
+        <p:nvPr/>
+      </p:nvGrpSpPr>
+      <p:grpSpPr>
+        <a:xfrm>
+          <a:off x="0" y="0"/>
+          <a:ext cx="0" cy="0"/>
+          <a:chOff x="0" y="0"/>
+          <a:chExt cx="0" cy="0"/>
+        </a:xfrm>
+      </p:grpSpPr>
+      <p:sp>
+        <p:nvSpPr>
+          <p:cNvPr id="2" name="Title 1">
+            <a:extLst>
+              <a:ext uri="{FF2B5EF4-FFF2-40B4-BE49-F238E27FC236}">
                 <a16:creationId xmlns:a16="http://schemas.microsoft.com/office/drawing/2014/main" id="{EE3F95F8-1047-644B-DD7F-9A17D513E804}"/>
               </a:ext>
             </a:extLst>
@@ -4630,7 +4808,7 @@
 </p:sld>
 </file>
 
-<file path=ppt/slides/slide8.xml><?xml version="1.0" encoding="utf-8"?>
+<file path=ppt/slides/slide9.xml><?xml version="1.0" encoding="utf-8"?>
 <p:sld xmlns:a="http://schemas.openxmlformats.org/drawingml/2006/main" xmlns:r="http://schemas.openxmlformats.org/officeDocument/2006/relationships" xmlns:p="http://schemas.openxmlformats.org/presentationml/2006/main">
   <p:cSld>
     <p:spTree>
